--- a/docs/project-guide/cen207-project-guide-slides.en.pptx
+++ b/docs/project-guide/cen207-project-guide-slides.en.pptx
@@ -12659,7 +12659,7 @@
                   <a:srgbClr val="1F2D3A"/>
                 </a:solidFill>
               </a:rPr>
-              <a:t>Write your choice in the </a:t>
+              <a:t>Write your choice in the shared </a:t>
             </a:r>
             <a:r>
               <a:rPr sz="2000" b="1">
@@ -12667,7 +12667,7 @@
                   <a:srgbClr val="1F2D3A"/>
                 </a:solidFill>
               </a:rPr>
-              <a:t>team and topic table</a:t>
+              <a:t>team and topic list</a:t>
             </a:r>
             <a:r>
               <a:rPr sz="2000" b="0">
@@ -12675,7 +12675,7 @@
                   <a:srgbClr val="1F2D3A"/>
                 </a:solidFill>
               </a:rPr>
-              <a:t> on Microsoft Teams — one topic per team, first to write it gets it</a:t>
+              <a:t> (link in the Teams post) — one topic per team, first to write it gets it</a:t>
             </a:r>
           </a:p>
           <a:p>
@@ -16974,7 +16974,7 @@
                   <a:srgbClr val="1F2D3A"/>
                 </a:solidFill>
               </a:rPr>
-              <a:t> at most 3 students (working alone is also allowed)</a:t>
+              <a:t> at most 5 students (working alone is also allowed)</a:t>
             </a:r>
           </a:p>
           <a:p>
@@ -26845,7 +26845,7 @@
                   <a:srgbClr val="1F2D3A"/>
                 </a:solidFill>
               </a:rPr>
-              <a:t>Work alone instead of a team of two?</a:t>
+              <a:t>Work alone instead of a team?</a:t>
             </a:r>
             <a:r>
               <a:rPr sz="2000" b="0">
@@ -26853,7 +26853,7 @@
                   <a:srgbClr val="1F2D3A"/>
                 </a:solidFill>
               </a:rPr>
-              <a:t> Yes — at most 3, working alone is allowed. Teams are fixed at the end of week 3.</a:t>
+              <a:t> Yes — at most 5, working alone is allowed. Teams are fixed at the end of week 3.</a:t>
             </a:r>
           </a:p>
         </p:txBody>
